--- a/docs/deck/SRM_Wizards_5_Submission.pptx
+++ b/docs/deck/SRM_Wizards_5_Submission.pptx
@@ -259,7 +259,7 @@
       <p15:sldGuideLst xmlns:p15="http://schemas.microsoft.com/office/powerpoint/2012/main"/>
     </p:ext>
     <p:ext uri="GoogleSlidesCustomDataVersion2">
-      <go:slidesCustomData xmlns="" xmlns:mc="http://schemas.openxmlformats.org/markup-compatibility/2006" xmlns:mv="urn:schemas-microsoft-com:mac:vml" xmlns:c="http://schemas.openxmlformats.org/drawingml/2006/chart" xmlns:dgm="http://schemas.openxmlformats.org/drawingml/2006/diagram" xmlns:o="urn:schemas-microsoft-com:office:office" xmlns:v="urn:schemas-microsoft-com:vml" xmlns:pvml="urn:schemas-microsoft-com:office:powerpoint" xmlns:com="http://schemas.openxmlformats.org/drawingml/2006/compatibility" xmlns:p14="http://schemas.microsoft.com/office/powerpoint/2010/main" xmlns:p15="http://schemas.microsoft.com/office/powerpoint/2012/main" xmlns:ahyp="http://schemas.microsoft.com/office/drawing/2018/hyperlinkcolor" xmlns:go="http://customooxmlschemas.google.com/" r:id="rId17" roundtripDataSignature="AMtx7mgQuomGbdS/wh2yqkB/K4YAZ70YAw=="/>
+      <go:slidesCustomData xmlns:go="http://customooxmlschemas.google.com/" xmlns:ahyp="http://schemas.microsoft.com/office/drawing/2018/hyperlinkcolor" xmlns:p15="http://schemas.microsoft.com/office/powerpoint/2012/main" xmlns:p14="http://schemas.microsoft.com/office/powerpoint/2010/main" xmlns:com="http://schemas.openxmlformats.org/drawingml/2006/compatibility" xmlns:pvml="urn:schemas-microsoft-com:office:powerpoint" xmlns:v="urn:schemas-microsoft-com:vml" xmlns:o="urn:schemas-microsoft-com:office:office" xmlns:dgm="http://schemas.openxmlformats.org/drawingml/2006/diagram" xmlns:c="http://schemas.openxmlformats.org/drawingml/2006/chart" xmlns:mv="urn:schemas-microsoft-com:mac:vml" xmlns:mc="http://schemas.openxmlformats.org/markup-compatibility/2006" xmlns="" r:id="rId17" roundtripDataSignature="AMtx7mgQuomGbdS/wh2yqkB/K4YAZ70YAw=="/>
     </p:ext>
   </p:extLst>
 </p:presentation>
@@ -14244,7 +14244,7 @@
                 <a:cs typeface="Times New Roman" panose="02020603050405020304" pitchFamily="18" charset="0"/>
                 <a:sym typeface="Calibri"/>
               </a:rPr>
-              <a:t> nothing finalizes without an explicit "yes", no duplicate state changes, no false "done". Seven confirmation-safety probes (E-01…E-07) are pinned as regression tests.</a:t>
+              <a:t> nothing finalizes without an explicit "yes", no duplicate state changes, no false "done". Nine confirmation-safety probes (E-01…E-09) are pinned as regression tests.</a:t>
             </a:r>
           </a:p>
           <a:p>
@@ -20224,7 +20224,7 @@
         </p:nvSpPr>
         <p:spPr>
           <a:xfrm>
-            <a:off x="838200" y="365126"/>
+            <a:off x="838198" y="-274636"/>
             <a:ext cx="10515600" cy="1139210"/>
           </a:xfrm>
           <a:prstGeom prst="rect">
@@ -20297,7 +20297,7 @@
         </p:nvSpPr>
         <p:spPr>
           <a:xfrm>
-            <a:off x="838200" y="1649999"/>
+            <a:off x="838198" y="479961"/>
             <a:ext cx="3371866" cy="4947445"/>
           </a:xfrm>
           <a:prstGeom prst="rect">
@@ -20541,6 +20541,37 @@
               </a:rPr>
               <a:t> handle unseen tools zero-shot</a:t>
             </a:r>
+          </a:p>
+          <a:p>
+            <a:pPr marL="228600" indent="-228600" algn="just">
+              <a:lnSpc>
+                <a:spcPct val="150000"/>
+              </a:lnSpc>
+              <a:spcBef>
+                <a:spcPts val="450"/>
+              </a:spcBef>
+              <a:buClr>
+                <a:srgbClr val="704EA6"/>
+              </a:buClr>
+            </a:pPr>
+            <a:r>
+              <a:rPr lang="en-US" sz="1500" dirty="0">
+                <a:solidFill>
+                  <a:schemeClr val="tx1"/>
+                </a:solidFill>
+                <a:latin typeface="Times New Roman" panose="02020603050405020304" pitchFamily="18" charset="0"/>
+                <a:cs typeface="Times New Roman" panose="02020603050405020304" pitchFamily="18" charset="0"/>
+              </a:rPr>
+              <a:t>Spoken-id repair: self-corrected ids ("order 4471, no wait, 90210") and spelled letter ids ("B O B" → BOB) resolve to the id the caller settled on</a:t>
+            </a:r>
+            <a:endParaRPr lang="en-US" sz="1500" b="0" dirty="0">
+              <a:solidFill>
+                <a:schemeClr val="tx1"/>
+              </a:solidFill>
+              <a:latin typeface="Times New Roman" panose="02020603050405020304" pitchFamily="18" charset="0"/>
+              <a:cs typeface="Times New Roman" panose="02020603050405020304" pitchFamily="18" charset="0"/>
+              <a:sym typeface="Calibri"/>
+            </a:endParaRPr>
           </a:p>
         </p:txBody>
       </p:sp>
@@ -20558,7 +20589,7 @@
         </p:nvSpPr>
         <p:spPr>
           <a:xfrm>
-            <a:off x="4410066" y="1650000"/>
+            <a:off x="4577216" y="670448"/>
             <a:ext cx="3371866" cy="4947444"/>
           </a:xfrm>
           <a:prstGeom prst="rect">
@@ -20759,7 +20790,7 @@
                 <a:cs typeface="Times New Roman" panose="02020603050405020304" pitchFamily="18" charset="0"/>
                 <a:sym typeface="Calibri"/>
               </a:rPr>
-              <a:t> run, 30 Sep 2026</a:t>
+              <a:t> run, 1 Oct 2026</a:t>
             </a:r>
             <a:r>
               <a:rPr lang="en-US" sz="1500" b="0" dirty="0">
@@ -20795,7 +20826,103 @@
                 <a:cs typeface="Times New Roman" panose="02020603050405020304" pitchFamily="18" charset="0"/>
                 <a:sym typeface="Calibri"/>
               </a:rPr>
-              <a:t>, judge off): turn-take 63/100; tool-selection 77.4%; argument acc. 43.7%; strict pass 13/100; avg latency 5.77 s</a:t>
+              <a:t>, judge off): turn-take </a:t>
+            </a:r>
+            <a:r>
+              <a:rPr lang="en-US" sz="1500" dirty="0">
+                <a:solidFill>
+                  <a:schemeClr val="tx1"/>
+                </a:solidFill>
+                <a:latin typeface="Times New Roman" panose="02020603050405020304" pitchFamily="18" charset="0"/>
+                <a:ea typeface="Calibri"/>
+                <a:cs typeface="Times New Roman" panose="02020603050405020304" pitchFamily="18" charset="0"/>
+                <a:sym typeface="Calibri"/>
+              </a:rPr>
+              <a:t>99</a:t>
+            </a:r>
+            <a:r>
+              <a:rPr lang="en-US" sz="1500" b="0" dirty="0">
+                <a:solidFill>
+                  <a:schemeClr val="tx1"/>
+                </a:solidFill>
+                <a:latin typeface="Times New Roman" panose="02020603050405020304" pitchFamily="18" charset="0"/>
+                <a:ea typeface="Calibri"/>
+                <a:cs typeface="Times New Roman" panose="02020603050405020304" pitchFamily="18" charset="0"/>
+                <a:sym typeface="Calibri"/>
+              </a:rPr>
+              <a:t>/100; tool-selection </a:t>
+            </a:r>
+            <a:r>
+              <a:rPr lang="en-US" sz="1500" dirty="0">
+                <a:solidFill>
+                  <a:schemeClr val="tx1"/>
+                </a:solidFill>
+                <a:latin typeface="Times New Roman" panose="02020603050405020304" pitchFamily="18" charset="0"/>
+                <a:ea typeface="Calibri"/>
+                <a:cs typeface="Times New Roman" panose="02020603050405020304" pitchFamily="18" charset="0"/>
+                <a:sym typeface="Calibri"/>
+              </a:rPr>
+              <a:t>80.6</a:t>
+            </a:r>
+            <a:r>
+              <a:rPr lang="en-US" sz="1500" b="0" dirty="0">
+                <a:solidFill>
+                  <a:schemeClr val="tx1"/>
+                </a:solidFill>
+                <a:latin typeface="Times New Roman" panose="02020603050405020304" pitchFamily="18" charset="0"/>
+                <a:ea typeface="Calibri"/>
+                <a:cs typeface="Times New Roman" panose="02020603050405020304" pitchFamily="18" charset="0"/>
+                <a:sym typeface="Calibri"/>
+              </a:rPr>
+              <a:t>%; argument acc. 39.7%; strict pass </a:t>
+            </a:r>
+            <a:r>
+              <a:rPr lang="en-US" sz="1500" dirty="0">
+                <a:solidFill>
+                  <a:schemeClr val="tx1"/>
+                </a:solidFill>
+                <a:latin typeface="Times New Roman" panose="02020603050405020304" pitchFamily="18" charset="0"/>
+                <a:ea typeface="Calibri"/>
+                <a:cs typeface="Times New Roman" panose="02020603050405020304" pitchFamily="18" charset="0"/>
+                <a:sym typeface="Calibri"/>
+              </a:rPr>
+              <a:t>28</a:t>
+            </a:r>
+            <a:r>
+              <a:rPr lang="en-US" sz="1500" b="0" dirty="0">
+                <a:solidFill>
+                  <a:schemeClr val="tx1"/>
+                </a:solidFill>
+                <a:latin typeface="Times New Roman" panose="02020603050405020304" pitchFamily="18" charset="0"/>
+                <a:ea typeface="Calibri"/>
+                <a:cs typeface="Times New Roman" panose="02020603050405020304" pitchFamily="18" charset="0"/>
+                <a:sym typeface="Calibri"/>
+              </a:rPr>
+              <a:t>/100; avg latency 5.</a:t>
+            </a:r>
+            <a:r>
+              <a:rPr lang="en-US" sz="1500" dirty="0">
+                <a:solidFill>
+                  <a:schemeClr val="tx1"/>
+                </a:solidFill>
+                <a:latin typeface="Times New Roman" panose="02020603050405020304" pitchFamily="18" charset="0"/>
+                <a:ea typeface="Calibri"/>
+                <a:cs typeface="Times New Roman" panose="02020603050405020304" pitchFamily="18" charset="0"/>
+                <a:sym typeface="Calibri"/>
+              </a:rPr>
+              <a:t>82</a:t>
+            </a:r>
+            <a:r>
+              <a:rPr lang="en-US" sz="1500" b="0" dirty="0">
+                <a:solidFill>
+                  <a:schemeClr val="tx1"/>
+                </a:solidFill>
+                <a:latin typeface="Times New Roman" panose="02020603050405020304" pitchFamily="18" charset="0"/>
+                <a:ea typeface="Calibri"/>
+                <a:cs typeface="Times New Roman" panose="02020603050405020304" pitchFamily="18" charset="0"/>
+                <a:sym typeface="Calibri"/>
+              </a:rPr>
+              <a:t> s</a:t>
             </a:r>
           </a:p>
           <a:p>
@@ -20834,7 +20961,7 @@
                 <a:cs typeface="Times New Roman" panose="02020603050405020304" pitchFamily="18" charset="0"/>
                 <a:sym typeface="Calibri"/>
               </a:rPr>
-              <a:t> 224 Python + 10 JS tests pass; integrity audit PASS</a:t>
+              <a:t> 242 Python + 10 JS tests pass; integrity audit PASS</a:t>
             </a:r>
           </a:p>
         </p:txBody>
@@ -20853,7 +20980,7 @@
         </p:nvSpPr>
         <p:spPr>
           <a:xfrm>
-            <a:off x="7981932" y="1650000"/>
+            <a:off x="8267069" y="670448"/>
             <a:ext cx="3371866" cy="4947444"/>
           </a:xfrm>
           <a:prstGeom prst="rect">
@@ -20907,7 +21034,7 @@
               <a:buChar char="•"/>
             </a:pPr>
             <a:r>
-              <a:rPr lang="en-US" sz="1500" b="0" dirty="0">
+              <a:rPr lang="en-US" sz="1500" dirty="0">
                 <a:solidFill>
                   <a:schemeClr val="tx1"/>
                 </a:solidFill>
@@ -20916,31 +21043,7 @@
                 <a:cs typeface="Times New Roman" panose="02020603050405020304" pitchFamily="18" charset="0"/>
                 <a:sym typeface="Calibri"/>
               </a:rPr>
-              <a:t>Live gap is mainly </a:t>
-            </a:r>
-            <a:r>
-              <a:rPr lang="en-US" sz="1500" b="1" dirty="0">
-                <a:solidFill>
-                  <a:schemeClr val="tx1"/>
-                </a:solidFill>
-                <a:latin typeface="Times New Roman" panose="02020603050405020304" pitchFamily="18" charset="0"/>
-                <a:ea typeface="Calibri"/>
-                <a:cs typeface="Times New Roman" panose="02020603050405020304" pitchFamily="18" charset="0"/>
-                <a:sym typeface="Calibri"/>
-              </a:rPr>
-              <a:t>STT surface-form errors</a:t>
-            </a:r>
-            <a:r>
-              <a:rPr lang="en-US" sz="1500" b="0" dirty="0">
-                <a:solidFill>
-                  <a:schemeClr val="tx1"/>
-                </a:solidFill>
-                <a:latin typeface="Times New Roman" panose="02020603050405020304" pitchFamily="18" charset="0"/>
-                <a:ea typeface="Calibri"/>
-                <a:cs typeface="Times New Roman" panose="02020603050405020304" pitchFamily="18" charset="0"/>
-                <a:sym typeface="Calibri"/>
-              </a:rPr>
-              <a:t> and slow injected tool calls (13.8 s) that clipped 17 travel-domain responses in the runner's recording window</a:t>
+              <a:t>Remaining live gap is argument extraction under real STT surface forms(wrong tools 43, wrong arguments 29 of 72 failures). One recording(housing_14_61517db6) never triggered VAD → no agent response; reported as a miss.</a:t>
             </a:r>
           </a:p>
           <a:p>

--- a/docs/deck/SRM_Wizards_5_Submission.pptx
+++ b/docs/deck/SRM_Wizards_5_Submission.pptx
@@ -20790,7 +20790,7 @@
                 <a:cs typeface="Times New Roman" panose="02020603050405020304" pitchFamily="18" charset="0"/>
                 <a:sym typeface="Calibri"/>
               </a:rPr>
-              <a:t> run, 1 Oct 2026</a:t>
+              <a:t> run, 30 Sep 2026</a:t>
             </a:r>
             <a:r>
               <a:rPr lang="en-US" sz="1500" b="0" dirty="0">
@@ -20874,7 +20874,7 @@
                 <a:cs typeface="Times New Roman" panose="02020603050405020304" pitchFamily="18" charset="0"/>
                 <a:sym typeface="Calibri"/>
               </a:rPr>
-              <a:t>%; argument acc. 39.7%; strict pass </a:t>
+              <a:t>%; argument acc. 43.7%; strict pass </a:t>
             </a:r>
             <a:r>
               <a:rPr lang="en-US" sz="1500" dirty="0">

--- a/docs/deck/SRM_Wizards_5_Submission.pptx
+++ b/docs/deck/SRM_Wizards_5_Submission.pptx
@@ -20790,7 +20790,7 @@
                 <a:cs typeface="Times New Roman" panose="02020603050405020304" pitchFamily="18" charset="0"/>
                 <a:sym typeface="Calibri"/>
               </a:rPr>
-              <a:t> run, 30 Sep 2026</a:t>
+              <a:t> run, 4 Oct 2026</a:t>
             </a:r>
             <a:r>
               <a:rPr lang="en-US" sz="1500" b="0" dirty="0">
@@ -20862,7 +20862,7 @@
                 <a:cs typeface="Times New Roman" panose="02020603050405020304" pitchFamily="18" charset="0"/>
                 <a:sym typeface="Calibri"/>
               </a:rPr>
-              <a:t>80.6</a:t>
+              <a:t>86.4</a:t>
             </a:r>
             <a:r>
               <a:rPr lang="en-US" sz="1500" b="0" dirty="0">
@@ -20874,7 +20874,7 @@
                 <a:cs typeface="Times New Roman" panose="02020603050405020304" pitchFamily="18" charset="0"/>
                 <a:sym typeface="Calibri"/>
               </a:rPr>
-              <a:t>%; argument acc. 43.7%; strict pass </a:t>
+              <a:t>%; argument acc. 55.2%; strict pass </a:t>
             </a:r>
             <a:r>
               <a:rPr lang="en-US" sz="1500" dirty="0">
@@ -20886,7 +20886,7 @@
                 <a:cs typeface="Times New Roman" panose="02020603050405020304" pitchFamily="18" charset="0"/>
                 <a:sym typeface="Calibri"/>
               </a:rPr>
-              <a:t>28</a:t>
+              <a:t>45</a:t>
             </a:r>
             <a:r>
               <a:rPr lang="en-US" sz="1500" b="0" dirty="0">
@@ -20910,7 +20910,7 @@
                 <a:cs typeface="Times New Roman" panose="02020603050405020304" pitchFamily="18" charset="0"/>
                 <a:sym typeface="Calibri"/>
               </a:rPr>
-              <a:t>82</a:t>
+              <a:t>01</a:t>
             </a:r>
             <a:r>
               <a:rPr lang="en-US" sz="1500" b="0" dirty="0">

--- a/docs/deck/SRM_Wizards_5_Submission.pptx
+++ b/docs/deck/SRM_Wizards_5_Submission.pptx
@@ -20862,7 +20862,7 @@
                 <a:cs typeface="Times New Roman" panose="02020603050405020304" pitchFamily="18" charset="0"/>
                 <a:sym typeface="Calibri"/>
               </a:rPr>
-              <a:t>86.4</a:t>
+              <a:t>84.8</a:t>
             </a:r>
             <a:r>
               <a:rPr lang="en-US" sz="1500" b="0" dirty="0">
@@ -20874,7 +20874,7 @@
                 <a:cs typeface="Times New Roman" panose="02020603050405020304" pitchFamily="18" charset="0"/>
                 <a:sym typeface="Calibri"/>
               </a:rPr>
-              <a:t>%; argument acc. 55.2%; strict pass </a:t>
+              <a:t>%; argument acc. 60.1%; strict pass </a:t>
             </a:r>
             <a:r>
               <a:rPr lang="en-US" sz="1500" dirty="0">
@@ -20886,7 +20886,7 @@
                 <a:cs typeface="Times New Roman" panose="02020603050405020304" pitchFamily="18" charset="0"/>
                 <a:sym typeface="Calibri"/>
               </a:rPr>
-              <a:t>45</a:t>
+              <a:t>50</a:t>
             </a:r>
             <a:r>
               <a:rPr lang="en-US" sz="1500" b="0" dirty="0">
@@ -20910,7 +20910,7 @@
                 <a:cs typeface="Times New Roman" panose="02020603050405020304" pitchFamily="18" charset="0"/>
                 <a:sym typeface="Calibri"/>
               </a:rPr>
-              <a:t>01</a:t>
+              <a:t>29</a:t>
             </a:r>
             <a:r>
               <a:rPr lang="en-US" sz="1500" b="0" dirty="0">
